--- a/topic-05-week5/unit-1/talk-1-switching/Encapsulation and Layers.pptx
+++ b/topic-05-week5/unit-1/talk-1-switching/Encapsulation and Layers.pptx
@@ -487,7 +487,7 @@
           <a:p>
             <a:fld id="{A81057AB-2EF4-4F91-A474-48A0D60D0BF4}" type="datetimeFigureOut">
               <a:rPr lang="en-IE" smtClean="0"/>
-              <a:t>06/10/2025</a:t>
+              <a:t>25/02/2026</a:t>
             </a:fld>
             <a:endParaRPr lang="en-IE"/>
           </a:p>
@@ -2217,7 +2217,7 @@
           <a:p>
             <a:fld id="{846CE7D5-CF57-46EF-B807-FDD0502418D4}" type="datetimeFigureOut">
               <a:rPr lang="en-US" smtClean="0"/>
-              <a:t>10/6/2025</a:t>
+              <a:t>2/25/2026</a:t>
             </a:fld>
             <a:endParaRPr lang="en-US"/>
           </a:p>
@@ -2385,7 +2385,7 @@
           <a:p>
             <a:fld id="{846CE7D5-CF57-46EF-B807-FDD0502418D4}" type="datetimeFigureOut">
               <a:rPr lang="en-US" smtClean="0"/>
-              <a:t>10/6/2025</a:t>
+              <a:t>2/25/2026</a:t>
             </a:fld>
             <a:endParaRPr lang="en-US"/>
           </a:p>
@@ -2563,7 +2563,7 @@
           <a:p>
             <a:fld id="{846CE7D5-CF57-46EF-B807-FDD0502418D4}" type="datetimeFigureOut">
               <a:rPr lang="en-US" smtClean="0"/>
-              <a:t>10/6/2025</a:t>
+              <a:t>2/25/2026</a:t>
             </a:fld>
             <a:endParaRPr lang="en-US"/>
           </a:p>
@@ -2893,7 +2893,7 @@
           <a:p>
             <a:fld id="{846CE7D5-CF57-46EF-B807-FDD0502418D4}" type="datetimeFigureOut">
               <a:rPr lang="en-US" smtClean="0"/>
-              <a:t>10/6/2025</a:t>
+              <a:t>2/25/2026</a:t>
             </a:fld>
             <a:endParaRPr lang="en-US"/>
           </a:p>
@@ -3138,7 +3138,7 @@
           <a:p>
             <a:fld id="{846CE7D5-CF57-46EF-B807-FDD0502418D4}" type="datetimeFigureOut">
               <a:rPr lang="en-US" smtClean="0"/>
-              <a:t>10/6/2025</a:t>
+              <a:t>2/25/2026</a:t>
             </a:fld>
             <a:endParaRPr lang="en-US"/>
           </a:p>
@@ -3367,7 +3367,7 @@
           <a:p>
             <a:fld id="{846CE7D5-CF57-46EF-B807-FDD0502418D4}" type="datetimeFigureOut">
               <a:rPr lang="en-US" smtClean="0"/>
-              <a:t>10/6/2025</a:t>
+              <a:t>2/25/2026</a:t>
             </a:fld>
             <a:endParaRPr lang="en-US"/>
           </a:p>
@@ -3731,7 +3731,7 @@
           <a:p>
             <a:fld id="{846CE7D5-CF57-46EF-B807-FDD0502418D4}" type="datetimeFigureOut">
               <a:rPr lang="en-US" smtClean="0"/>
-              <a:t>10/6/2025</a:t>
+              <a:t>2/25/2026</a:t>
             </a:fld>
             <a:endParaRPr lang="en-US"/>
           </a:p>
@@ -3848,7 +3848,7 @@
           <a:p>
             <a:fld id="{846CE7D5-CF57-46EF-B807-FDD0502418D4}" type="datetimeFigureOut">
               <a:rPr lang="en-US" smtClean="0"/>
-              <a:t>10/6/2025</a:t>
+              <a:t>2/25/2026</a:t>
             </a:fld>
             <a:endParaRPr lang="en-US"/>
           </a:p>
@@ -3943,7 +3943,7 @@
           <a:p>
             <a:fld id="{846CE7D5-CF57-46EF-B807-FDD0502418D4}" type="datetimeFigureOut">
               <a:rPr lang="en-US" smtClean="0"/>
-              <a:t>10/6/2025</a:t>
+              <a:t>2/25/2026</a:t>
             </a:fld>
             <a:endParaRPr lang="en-US"/>
           </a:p>
@@ -4218,7 +4218,7 @@
           <a:p>
             <a:fld id="{846CE7D5-CF57-46EF-B807-FDD0502418D4}" type="datetimeFigureOut">
               <a:rPr lang="en-US" smtClean="0"/>
-              <a:t>10/6/2025</a:t>
+              <a:t>2/25/2026</a:t>
             </a:fld>
             <a:endParaRPr lang="en-US"/>
           </a:p>
@@ -4473,7 +4473,7 @@
           <a:p>
             <a:fld id="{846CE7D5-CF57-46EF-B807-FDD0502418D4}" type="datetimeFigureOut">
               <a:rPr lang="en-US" smtClean="0"/>
-              <a:t>10/6/2025</a:t>
+              <a:t>2/25/2026</a:t>
             </a:fld>
             <a:endParaRPr lang="en-US"/>
           </a:p>
@@ -4684,7 +4684,7 @@
           <a:p>
             <a:fld id="{846CE7D5-CF57-46EF-B807-FDD0502418D4}" type="datetimeFigureOut">
               <a:rPr lang="en-US" smtClean="0"/>
-              <a:t>10/6/2025</a:t>
+              <a:t>2/25/2026</a:t>
             </a:fld>
             <a:endParaRPr lang="en-US"/>
           </a:p>
@@ -5360,7 +5360,7 @@
                   <a:schemeClr val="bg1"/>
                 </a:solidFill>
               </a:rPr>
-              <a:t>2025</a:t>
+              <a:t>2026</a:t>
             </a:r>
           </a:p>
         </p:txBody>
